--- a/robot-arm-curriculum/slides/로봇팔_수업진행_통합.pptx
+++ b/robot-arm-curriculum/slides/로봇팔_수업진행_통합.pptx
@@ -2966,7 +2966,7 @@
                 <a:ea typeface="맑은 고딕" pitchFamily="34" charset="-122"/>
                 <a:cs typeface="맑은 고딕" pitchFamily="34" charset="-120"/>
               </a:rPr>
-              <a:t>코드 02</a:t>
+              <a:t>코드 07</a:t>
             </a:r>
             <a:endParaRPr lang="en-US" sz="1700" dirty="0"/>
           </a:p>
@@ -4382,7 +4382,7 @@
                 <a:ea typeface="맑은 고딕" pitchFamily="34" charset="-122"/>
                 <a:cs typeface="맑은 고딕" pitchFamily="34" charset="-120"/>
               </a:rPr>
-              <a:t>코드 03</a:t>
+              <a:t>코드 08</a:t>
             </a:r>
             <a:endParaRPr lang="en-US" sz="1700" dirty="0"/>
           </a:p>
@@ -5798,7 +5798,7 @@
                 <a:ea typeface="맑은 고딕" pitchFamily="34" charset="-122"/>
                 <a:cs typeface="맑은 고딕" pitchFamily="34" charset="-120"/>
               </a:rPr>
-              <a:t>코드 03·04</a:t>
+              <a:t>코드 08·09</a:t>
             </a:r>
             <a:endParaRPr lang="en-US" sz="1700" dirty="0"/>
           </a:p>
@@ -11398,7 +11398,7 @@
                 <a:ea typeface="맑은 고딕" pitchFamily="34" charset="-122"/>
                 <a:cs typeface="맑은 고딕" pitchFamily="34" charset="-120"/>
               </a:rPr>
-              <a:t>코드 01</a:t>
+              <a:t>코드 04</a:t>
             </a:r>
             <a:endParaRPr lang="en-US" sz="1700" dirty="0"/>
           </a:p>
@@ -12814,7 +12814,7 @@
                 <a:ea typeface="맑은 고딕" pitchFamily="34" charset="-122"/>
                 <a:cs typeface="맑은 고딕" pitchFamily="34" charset="-120"/>
               </a:rPr>
-              <a:t>코드 01</a:t>
+              <a:t>코드 04</a:t>
             </a:r>
             <a:endParaRPr lang="en-US" sz="1700" dirty="0"/>
           </a:p>
@@ -14230,7 +14230,7 @@
                 <a:ea typeface="맑은 고딕" pitchFamily="34" charset="-122"/>
                 <a:cs typeface="맑은 고딕" pitchFamily="34" charset="-120"/>
               </a:rPr>
-              <a:t>코드 01·02</a:t>
+              <a:t>코드 04·07</a:t>
             </a:r>
             <a:endParaRPr lang="en-US" sz="1700" dirty="0"/>
           </a:p>
